--- a/RabbitMQ & MassTransit.pptx
+++ b/RabbitMQ & MassTransit.pptx
@@ -237,7 +237,7 @@
           <a:p>
             <a:fld id="{01631C5A-1C44-43A2-8CD5-DBA9B3FCE99E}" type="datetimeFigureOut">
               <a:rPr lang="en-US" smtClean="0"/>
-              <a:t>5/19/2026</a:t>
+              <a:t>5/22/2026</a:t>
             </a:fld>
             <a:endParaRPr lang="en-US"/>
           </a:p>
@@ -1827,7 +1827,7 @@
           <a:p>
             <a:fld id="{8AA76FC4-8E05-4A38-8859-27ED204A1698}" type="datetimeFigureOut">
               <a:rPr lang="en-US" smtClean="0"/>
-              <a:t>5/19/2026</a:t>
+              <a:t>5/22/2026</a:t>
             </a:fld>
             <a:endParaRPr lang="en-US"/>
           </a:p>
@@ -2035,7 +2035,7 @@
           <a:p>
             <a:fld id="{8AA76FC4-8E05-4A38-8859-27ED204A1698}" type="datetimeFigureOut">
               <a:rPr lang="en-US" smtClean="0"/>
-              <a:t>5/19/2026</a:t>
+              <a:t>5/22/2026</a:t>
             </a:fld>
             <a:endParaRPr lang="en-US"/>
           </a:p>
@@ -2298,7 +2298,7 @@
           <a:p>
             <a:fld id="{8AA76FC4-8E05-4A38-8859-27ED204A1698}" type="datetimeFigureOut">
               <a:rPr lang="en-US" smtClean="0"/>
-              <a:t>5/19/2026</a:t>
+              <a:t>5/22/2026</a:t>
             </a:fld>
             <a:endParaRPr lang="en-US"/>
           </a:p>
@@ -2573,7 +2573,7 @@
           <a:p>
             <a:fld id="{8AA76FC4-8E05-4A38-8859-27ED204A1698}" type="datetimeFigureOut">
               <a:rPr lang="en-US" smtClean="0"/>
-              <a:t>5/19/2026</a:t>
+              <a:t>5/22/2026</a:t>
             </a:fld>
             <a:endParaRPr lang="en-US"/>
           </a:p>
@@ -2838,7 +2838,7 @@
           <a:p>
             <a:fld id="{8AA76FC4-8E05-4A38-8859-27ED204A1698}" type="datetimeFigureOut">
               <a:rPr lang="en-US" smtClean="0"/>
-              <a:t>5/19/2026</a:t>
+              <a:t>5/22/2026</a:t>
             </a:fld>
             <a:endParaRPr lang="en-US"/>
           </a:p>
@@ -3250,7 +3250,7 @@
           <a:p>
             <a:fld id="{8AA76FC4-8E05-4A38-8859-27ED204A1698}" type="datetimeFigureOut">
               <a:rPr lang="en-US" smtClean="0"/>
-              <a:t>5/19/2026</a:t>
+              <a:t>5/22/2026</a:t>
             </a:fld>
             <a:endParaRPr lang="en-US"/>
           </a:p>
@@ -3391,7 +3391,7 @@
           <a:p>
             <a:fld id="{8AA76FC4-8E05-4A38-8859-27ED204A1698}" type="datetimeFigureOut">
               <a:rPr lang="en-US" smtClean="0"/>
-              <a:t>5/19/2026</a:t>
+              <a:t>5/22/2026</a:t>
             </a:fld>
             <a:endParaRPr lang="en-US"/>
           </a:p>
@@ -3702,7 +3702,7 @@
           <a:p>
             <a:fld id="{8AA76FC4-8E05-4A38-8859-27ED204A1698}" type="datetimeFigureOut">
               <a:rPr lang="en-US" smtClean="0"/>
-              <a:t>5/19/2026</a:t>
+              <a:t>5/22/2026</a:t>
             </a:fld>
             <a:endParaRPr lang="en-US"/>
           </a:p>
@@ -3990,7 +3990,7 @@
           <a:p>
             <a:fld id="{8AA76FC4-8E05-4A38-8859-27ED204A1698}" type="datetimeFigureOut">
               <a:rPr lang="en-US" smtClean="0"/>
-              <a:t>5/19/2026</a:t>
+              <a:t>5/22/2026</a:t>
             </a:fld>
             <a:endParaRPr lang="en-US"/>
           </a:p>
@@ -4188,7 +4188,7 @@
           <a:p>
             <a:fld id="{8AA76FC4-8E05-4A38-8859-27ED204A1698}" type="datetimeFigureOut">
               <a:rPr lang="en-US" smtClean="0"/>
-              <a:t>5/19/2026</a:t>
+              <a:t>5/22/2026</a:t>
             </a:fld>
             <a:endParaRPr lang="en-US"/>
           </a:p>
@@ -4432,7 +4432,7 @@
           <a:p>
             <a:fld id="{8AA76FC4-8E05-4A38-8859-27ED204A1698}" type="datetimeFigureOut">
               <a:rPr lang="en-US" smtClean="0"/>
-              <a:t>5/19/2026</a:t>
+              <a:t>5/22/2026</a:t>
             </a:fld>
             <a:endParaRPr lang="en-US"/>
           </a:p>
@@ -11250,34 +11250,682 @@
           <a:p>
             <a:pPr algn="l"/>
             <a:r>
-              <a:rPr lang="en-US" sz="1000">
+              <a:rPr lang="en-US" sz="1000" dirty="0">
                 <a:solidFill>
                   <a:srgbClr val="E2E8F0"/>
                 </a:solidFill>
                 <a:latin typeface="Consolas"/>
               </a:rPr>
               <a:t>// 1. Message contracts
-public record CheckOrderStatus(Guid OrderId);
-public record OrderStatusResult(Guid OrderId, string Status);
-// 2. Register (Program.cs)
-builder.Services.AddMassTransit(x =&gt; {
-    x.AddConsumer&lt;CheckOrderStatusConsumer&gt;();
-    x.UsingRabbitMq((ctx, cfg) =&gt; cfg.ConfigureEndpoints(ctx));
+public record </a:t>
+            </a:r>
+            <a:r>
+              <a:rPr lang="en-US" sz="1000" dirty="0" err="1">
+                <a:solidFill>
+                  <a:srgbClr val="E2E8F0"/>
+                </a:solidFill>
+                <a:latin typeface="Consolas"/>
+              </a:rPr>
+              <a:t>CheckOrderStatus</a:t>
+            </a:r>
+            <a:r>
+              <a:rPr lang="en-US" sz="1000" dirty="0">
+                <a:solidFill>
+                  <a:srgbClr val="E2E8F0"/>
+                </a:solidFill>
+                <a:latin typeface="Consolas"/>
+              </a:rPr>
+              <a:t>(</a:t>
+            </a:r>
+            <a:r>
+              <a:rPr lang="en-US" sz="1000" dirty="0" err="1">
+                <a:solidFill>
+                  <a:srgbClr val="E2E8F0"/>
+                </a:solidFill>
+                <a:latin typeface="Consolas"/>
+              </a:rPr>
+              <a:t>Guid</a:t>
+            </a:r>
+            <a:r>
+              <a:rPr lang="en-US" sz="1000" dirty="0">
+                <a:solidFill>
+                  <a:srgbClr val="E2E8F0"/>
+                </a:solidFill>
+                <a:latin typeface="Consolas"/>
+              </a:rPr>
+              <a:t> </a:t>
+            </a:r>
+            <a:r>
+              <a:rPr lang="en-US" sz="1000" dirty="0" err="1">
+                <a:solidFill>
+                  <a:srgbClr val="E2E8F0"/>
+                </a:solidFill>
+                <a:latin typeface="Consolas"/>
+              </a:rPr>
+              <a:t>OrderId</a:t>
+            </a:r>
+            <a:r>
+              <a:rPr lang="en-US" sz="1000" dirty="0">
+                <a:solidFill>
+                  <a:srgbClr val="E2E8F0"/>
+                </a:solidFill>
+                <a:latin typeface="Consolas"/>
+              </a:rPr>
+              <a:t>);
+public record </a:t>
+            </a:r>
+            <a:r>
+              <a:rPr lang="en-US" sz="1000" dirty="0" err="1">
+                <a:solidFill>
+                  <a:srgbClr val="E2E8F0"/>
+                </a:solidFill>
+                <a:latin typeface="Consolas"/>
+              </a:rPr>
+              <a:t>OrderStatusResult</a:t>
+            </a:r>
+            <a:r>
+              <a:rPr lang="en-US" sz="1000" dirty="0">
+                <a:solidFill>
+                  <a:srgbClr val="E2E8F0"/>
+                </a:solidFill>
+                <a:latin typeface="Consolas"/>
+              </a:rPr>
+              <a:t>(</a:t>
+            </a:r>
+            <a:r>
+              <a:rPr lang="en-US" sz="1000" dirty="0" err="1">
+                <a:solidFill>
+                  <a:srgbClr val="E2E8F0"/>
+                </a:solidFill>
+                <a:latin typeface="Consolas"/>
+              </a:rPr>
+              <a:t>Guid</a:t>
+            </a:r>
+            <a:r>
+              <a:rPr lang="en-US" sz="1000" dirty="0">
+                <a:solidFill>
+                  <a:srgbClr val="E2E8F0"/>
+                </a:solidFill>
+                <a:latin typeface="Consolas"/>
+              </a:rPr>
+              <a:t> </a:t>
+            </a:r>
+            <a:r>
+              <a:rPr lang="en-US" sz="1000" dirty="0" err="1">
+                <a:solidFill>
+                  <a:srgbClr val="E2E8F0"/>
+                </a:solidFill>
+                <a:latin typeface="Consolas"/>
+              </a:rPr>
+              <a:t>OrderId</a:t>
+            </a:r>
+            <a:r>
+              <a:rPr lang="en-US" sz="1000" dirty="0">
+                <a:solidFill>
+                  <a:srgbClr val="E2E8F0"/>
+                </a:solidFill>
+                <a:latin typeface="Consolas"/>
+              </a:rPr>
+              <a:t>, string Status);
+// 2. Register (</a:t>
+            </a:r>
+            <a:r>
+              <a:rPr lang="en-US" sz="1000" dirty="0" err="1">
+                <a:solidFill>
+                  <a:srgbClr val="E2E8F0"/>
+                </a:solidFill>
+                <a:latin typeface="Consolas"/>
+              </a:rPr>
+              <a:t>Program.cs</a:t>
+            </a:r>
+            <a:r>
+              <a:rPr lang="en-US" sz="1000" dirty="0">
+                <a:solidFill>
+                  <a:srgbClr val="E2E8F0"/>
+                </a:solidFill>
+                <a:latin typeface="Consolas"/>
+              </a:rPr>
+              <a:t>)
+</a:t>
+            </a:r>
+            <a:r>
+              <a:rPr lang="en-US" sz="1000" dirty="0" err="1">
+                <a:solidFill>
+                  <a:srgbClr val="E2E8F0"/>
+                </a:solidFill>
+                <a:latin typeface="Consolas"/>
+              </a:rPr>
+              <a:t>builder.Services.AddMassTransit</a:t>
+            </a:r>
+            <a:r>
+              <a:rPr lang="en-US" sz="1000" dirty="0">
+                <a:solidFill>
+                  <a:srgbClr val="E2E8F0"/>
+                </a:solidFill>
+                <a:latin typeface="Consolas"/>
+              </a:rPr>
+              <a:t>(x =&gt; {
+    </a:t>
+            </a:r>
+            <a:r>
+              <a:rPr lang="en-US" sz="1000" dirty="0" err="1">
+                <a:solidFill>
+                  <a:srgbClr val="E2E8F0"/>
+                </a:solidFill>
+                <a:latin typeface="Consolas"/>
+              </a:rPr>
+              <a:t>x.AddConsumer</a:t>
+            </a:r>
+            <a:r>
+              <a:rPr lang="en-US" sz="1000" dirty="0">
+                <a:solidFill>
+                  <a:srgbClr val="E2E8F0"/>
+                </a:solidFill>
+                <a:latin typeface="Consolas"/>
+              </a:rPr>
+              <a:t>&lt;</a:t>
+            </a:r>
+            <a:r>
+              <a:rPr lang="en-US" sz="1000" dirty="0" err="1">
+                <a:solidFill>
+                  <a:srgbClr val="E2E8F0"/>
+                </a:solidFill>
+                <a:latin typeface="Consolas"/>
+              </a:rPr>
+              <a:t>CheckOrderStatusConsumer</a:t>
+            </a:r>
+            <a:r>
+              <a:rPr lang="en-US" sz="1000" dirty="0">
+                <a:solidFill>
+                  <a:srgbClr val="E2E8F0"/>
+                </a:solidFill>
+                <a:latin typeface="Consolas"/>
+              </a:rPr>
+              <a:t>&gt;();
+    </a:t>
+            </a:r>
+            <a:r>
+              <a:rPr lang="en-US" sz="1000" dirty="0" err="1">
+                <a:solidFill>
+                  <a:srgbClr val="E2E8F0"/>
+                </a:solidFill>
+                <a:latin typeface="Consolas"/>
+              </a:rPr>
+              <a:t>x.UsingRabbitMq</a:t>
+            </a:r>
+            <a:r>
+              <a:rPr lang="en-US" sz="1000" dirty="0">
+                <a:solidFill>
+                  <a:srgbClr val="E2E8F0"/>
+                </a:solidFill>
+                <a:latin typeface="Consolas"/>
+              </a:rPr>
+              <a:t>((</a:t>
+            </a:r>
+            <a:r>
+              <a:rPr lang="en-US" sz="1000" dirty="0" err="1">
+                <a:solidFill>
+                  <a:srgbClr val="E2E8F0"/>
+                </a:solidFill>
+                <a:latin typeface="Consolas"/>
+              </a:rPr>
+              <a:t>ctx</a:t>
+            </a:r>
+            <a:r>
+              <a:rPr lang="en-US" sz="1000" dirty="0">
+                <a:solidFill>
+                  <a:srgbClr val="E2E8F0"/>
+                </a:solidFill>
+                <a:latin typeface="Consolas"/>
+              </a:rPr>
+              <a:t>, </a:t>
+            </a:r>
+            <a:r>
+              <a:rPr lang="en-US" sz="1000" dirty="0" err="1">
+                <a:solidFill>
+                  <a:srgbClr val="E2E8F0"/>
+                </a:solidFill>
+                <a:latin typeface="Consolas"/>
+              </a:rPr>
+              <a:t>cfg</a:t>
+            </a:r>
+            <a:r>
+              <a:rPr lang="en-US" sz="1000" dirty="0">
+                <a:solidFill>
+                  <a:srgbClr val="E2E8F0"/>
+                </a:solidFill>
+                <a:latin typeface="Consolas"/>
+              </a:rPr>
+              <a:t>) =&gt; </a:t>
+            </a:r>
+            <a:r>
+              <a:rPr lang="en-US" sz="1000" dirty="0" err="1">
+                <a:solidFill>
+                  <a:srgbClr val="E2E8F0"/>
+                </a:solidFill>
+                <a:latin typeface="Consolas"/>
+              </a:rPr>
+              <a:t>cfg.ConfigureEndpoints</a:t>
+            </a:r>
+            <a:r>
+              <a:rPr lang="en-US" sz="1000" dirty="0">
+                <a:solidFill>
+                  <a:srgbClr val="E2E8F0"/>
+                </a:solidFill>
+                <a:latin typeface="Consolas"/>
+              </a:rPr>
+              <a:t>(</a:t>
+            </a:r>
+            <a:r>
+              <a:rPr lang="en-US" sz="1000" dirty="0" err="1">
+                <a:solidFill>
+                  <a:srgbClr val="E2E8F0"/>
+                </a:solidFill>
+                <a:latin typeface="Consolas"/>
+              </a:rPr>
+              <a:t>ctx</a:t>
+            </a:r>
+            <a:r>
+              <a:rPr lang="en-US" sz="1000" dirty="0">
+                <a:solidFill>
+                  <a:srgbClr val="E2E8F0"/>
+                </a:solidFill>
+                <a:latin typeface="Consolas"/>
+              </a:rPr>
+              <a:t>));
 });
 // 3. Inject &amp; use request client
-public class OrderController(IRequestClient&lt;CheckOrderStatus&gt; client) {
-    public async Task&lt;IActionResult&gt; GetStatus(Guid id) {
-        var response = await client.GetResponse&lt;OrderStatusResult&gt;(
-            new CheckOrderStatus(id));
-        return Ok(response.Message.Status);
+public class </a:t>
+            </a:r>
+            <a:r>
+              <a:rPr lang="en-US" sz="1000" dirty="0" err="1">
+                <a:solidFill>
+                  <a:srgbClr val="E2E8F0"/>
+                </a:solidFill>
+                <a:latin typeface="Consolas"/>
+              </a:rPr>
+              <a:t>OrderController</a:t>
+            </a:r>
+            <a:r>
+              <a:rPr lang="en-US" sz="1000" dirty="0">
+                <a:solidFill>
+                  <a:srgbClr val="E2E8F0"/>
+                </a:solidFill>
+                <a:latin typeface="Consolas"/>
+              </a:rPr>
+              <a:t>(</a:t>
+            </a:r>
+            <a:r>
+              <a:rPr lang="en-US" sz="1000" dirty="0" err="1">
+                <a:solidFill>
+                  <a:srgbClr val="E2E8F0"/>
+                </a:solidFill>
+                <a:latin typeface="Consolas"/>
+              </a:rPr>
+              <a:t>IRequestClient</a:t>
+            </a:r>
+            <a:r>
+              <a:rPr lang="en-US" sz="1000" dirty="0">
+                <a:solidFill>
+                  <a:srgbClr val="E2E8F0"/>
+                </a:solidFill>
+                <a:latin typeface="Consolas"/>
+              </a:rPr>
+              <a:t>&lt;</a:t>
+            </a:r>
+            <a:r>
+              <a:rPr lang="en-US" sz="1000" dirty="0" err="1">
+                <a:solidFill>
+                  <a:srgbClr val="E2E8F0"/>
+                </a:solidFill>
+                <a:latin typeface="Consolas"/>
+              </a:rPr>
+              <a:t>CheckOrderStatus</a:t>
+            </a:r>
+            <a:r>
+              <a:rPr lang="en-US" sz="1000" dirty="0">
+                <a:solidFill>
+                  <a:srgbClr val="E2E8F0"/>
+                </a:solidFill>
+                <a:latin typeface="Consolas"/>
+              </a:rPr>
+              <a:t>&gt; client) {
+    public async Task&lt;</a:t>
+            </a:r>
+            <a:r>
+              <a:rPr lang="en-US" sz="1000" dirty="0" err="1">
+                <a:solidFill>
+                  <a:srgbClr val="E2E8F0"/>
+                </a:solidFill>
+                <a:latin typeface="Consolas"/>
+              </a:rPr>
+              <a:t>IActionResult</a:t>
+            </a:r>
+            <a:r>
+              <a:rPr lang="en-US" sz="1000" dirty="0">
+                <a:solidFill>
+                  <a:srgbClr val="E2E8F0"/>
+                </a:solidFill>
+                <a:latin typeface="Consolas"/>
+              </a:rPr>
+              <a:t>&gt; </a:t>
+            </a:r>
+            <a:r>
+              <a:rPr lang="en-US" sz="1000" dirty="0" err="1">
+                <a:solidFill>
+                  <a:srgbClr val="E2E8F0"/>
+                </a:solidFill>
+                <a:latin typeface="Consolas"/>
+              </a:rPr>
+              <a:t>GetStatus</a:t>
+            </a:r>
+            <a:r>
+              <a:rPr lang="en-US" sz="1000" dirty="0">
+                <a:solidFill>
+                  <a:srgbClr val="E2E8F0"/>
+                </a:solidFill>
+                <a:latin typeface="Consolas"/>
+              </a:rPr>
+              <a:t>(</a:t>
+            </a:r>
+            <a:r>
+              <a:rPr lang="en-US" sz="1000" dirty="0" err="1">
+                <a:solidFill>
+                  <a:srgbClr val="E2E8F0"/>
+                </a:solidFill>
+                <a:latin typeface="Consolas"/>
+              </a:rPr>
+              <a:t>Guid</a:t>
+            </a:r>
+            <a:r>
+              <a:rPr lang="en-US" sz="1000" dirty="0">
+                <a:solidFill>
+                  <a:srgbClr val="E2E8F0"/>
+                </a:solidFill>
+                <a:latin typeface="Consolas"/>
+              </a:rPr>
+              <a:t> id) {
+        var response = await </a:t>
+            </a:r>
+            <a:r>
+              <a:rPr lang="en-US" sz="1000" dirty="0" err="1">
+                <a:solidFill>
+                  <a:srgbClr val="E2E8F0"/>
+                </a:solidFill>
+                <a:latin typeface="Consolas"/>
+              </a:rPr>
+              <a:t>client.GetResponse</a:t>
+            </a:r>
+            <a:r>
+              <a:rPr lang="en-US" sz="1000" dirty="0">
+                <a:solidFill>
+                  <a:srgbClr val="E2E8F0"/>
+                </a:solidFill>
+                <a:latin typeface="Consolas"/>
+              </a:rPr>
+              <a:t>&lt;</a:t>
+            </a:r>
+            <a:r>
+              <a:rPr lang="en-US" sz="1000" dirty="0" err="1">
+                <a:solidFill>
+                  <a:srgbClr val="E2E8F0"/>
+                </a:solidFill>
+                <a:latin typeface="Consolas"/>
+              </a:rPr>
+              <a:t>OrderStatusResult</a:t>
+            </a:r>
+            <a:r>
+              <a:rPr lang="en-US" sz="1000" dirty="0">
+                <a:solidFill>
+                  <a:srgbClr val="E2E8F0"/>
+                </a:solidFill>
+                <a:latin typeface="Consolas"/>
+              </a:rPr>
+              <a:t>&gt;(
+            new </a:t>
+            </a:r>
+            <a:r>
+              <a:rPr lang="en-US" sz="1000" dirty="0" err="1">
+                <a:solidFill>
+                  <a:srgbClr val="E2E8F0"/>
+                </a:solidFill>
+                <a:latin typeface="Consolas"/>
+              </a:rPr>
+              <a:t>CheckOrderStatus</a:t>
+            </a:r>
+            <a:r>
+              <a:rPr lang="en-US" sz="1000" dirty="0">
+                <a:solidFill>
+                  <a:srgbClr val="E2E8F0"/>
+                </a:solidFill>
+                <a:latin typeface="Consolas"/>
+              </a:rPr>
+              <a:t>(id));
+        return Ok(</a:t>
+            </a:r>
+            <a:r>
+              <a:rPr lang="en-US" sz="1000" dirty="0" err="1">
+                <a:solidFill>
+                  <a:srgbClr val="E2E8F0"/>
+                </a:solidFill>
+                <a:latin typeface="Consolas"/>
+              </a:rPr>
+              <a:t>response.Message.Status</a:t>
+            </a:r>
+            <a:r>
+              <a:rPr lang="en-US" sz="1000" dirty="0">
+                <a:solidFill>
+                  <a:srgbClr val="E2E8F0"/>
+                </a:solidFill>
+                <a:latin typeface="Consolas"/>
+              </a:rPr>
+              <a:t>);
     }
 }
 // 4. Consumer — respond to the request
-public class CheckOrderStatusConsumer : IConsumer&lt;CheckOrderStatus&gt; {
-    public async Task Consume(ConsumeContext&lt;CheckOrderStatus&gt; ctx) {
-        var status = LookUpStatus(ctx.Message.OrderId);
-        await ctx.RespondAsync(
-            new OrderStatusResult(ctx.Message.OrderId, status));
+public class </a:t>
+            </a:r>
+            <a:r>
+              <a:rPr lang="en-US" sz="1000" dirty="0" err="1">
+                <a:solidFill>
+                  <a:srgbClr val="E2E8F0"/>
+                </a:solidFill>
+                <a:latin typeface="Consolas"/>
+              </a:rPr>
+              <a:t>CheckOrderStatusConsumer</a:t>
+            </a:r>
+            <a:r>
+              <a:rPr lang="en-US" sz="1000" dirty="0">
+                <a:solidFill>
+                  <a:srgbClr val="E2E8F0"/>
+                </a:solidFill>
+                <a:latin typeface="Consolas"/>
+              </a:rPr>
+              <a:t> : </a:t>
+            </a:r>
+            <a:r>
+              <a:rPr lang="en-US" sz="1000" dirty="0" err="1">
+                <a:solidFill>
+                  <a:srgbClr val="E2E8F0"/>
+                </a:solidFill>
+                <a:latin typeface="Consolas"/>
+              </a:rPr>
+              <a:t>IConsumer</a:t>
+            </a:r>
+            <a:r>
+              <a:rPr lang="en-US" sz="1000" dirty="0">
+                <a:solidFill>
+                  <a:srgbClr val="E2E8F0"/>
+                </a:solidFill>
+                <a:latin typeface="Consolas"/>
+              </a:rPr>
+              <a:t>&lt;</a:t>
+            </a:r>
+            <a:r>
+              <a:rPr lang="en-US" sz="1000" dirty="0" err="1">
+                <a:solidFill>
+                  <a:srgbClr val="E2E8F0"/>
+                </a:solidFill>
+                <a:latin typeface="Consolas"/>
+              </a:rPr>
+              <a:t>CheckOrderStatus</a:t>
+            </a:r>
+            <a:r>
+              <a:rPr lang="en-US" sz="1000" dirty="0">
+                <a:solidFill>
+                  <a:srgbClr val="E2E8F0"/>
+                </a:solidFill>
+                <a:latin typeface="Consolas"/>
+              </a:rPr>
+              <a:t>&gt; {
+    public async Task Consume(</a:t>
+            </a:r>
+            <a:r>
+              <a:rPr lang="en-US" sz="1000" dirty="0" err="1">
+                <a:solidFill>
+                  <a:srgbClr val="E2E8F0"/>
+                </a:solidFill>
+                <a:latin typeface="Consolas"/>
+              </a:rPr>
+              <a:t>ConsumeContext</a:t>
+            </a:r>
+            <a:r>
+              <a:rPr lang="en-US" sz="1000" dirty="0">
+                <a:solidFill>
+                  <a:srgbClr val="E2E8F0"/>
+                </a:solidFill>
+                <a:latin typeface="Consolas"/>
+              </a:rPr>
+              <a:t>&lt;</a:t>
+            </a:r>
+            <a:r>
+              <a:rPr lang="en-US" sz="1000" dirty="0" err="1">
+                <a:solidFill>
+                  <a:srgbClr val="E2E8F0"/>
+                </a:solidFill>
+                <a:latin typeface="Consolas"/>
+              </a:rPr>
+              <a:t>CheckOrderStatus</a:t>
+            </a:r>
+            <a:r>
+              <a:rPr lang="en-US" sz="1000" dirty="0">
+                <a:solidFill>
+                  <a:srgbClr val="E2E8F0"/>
+                </a:solidFill>
+                <a:latin typeface="Consolas"/>
+              </a:rPr>
+              <a:t>&gt; </a:t>
+            </a:r>
+            <a:r>
+              <a:rPr lang="en-US" sz="1000" dirty="0" err="1">
+                <a:solidFill>
+                  <a:srgbClr val="E2E8F0"/>
+                </a:solidFill>
+                <a:latin typeface="Consolas"/>
+              </a:rPr>
+              <a:t>ctx</a:t>
+            </a:r>
+            <a:r>
+              <a:rPr lang="en-US" sz="1000" dirty="0">
+                <a:solidFill>
+                  <a:srgbClr val="E2E8F0"/>
+                </a:solidFill>
+                <a:latin typeface="Consolas"/>
+              </a:rPr>
+              <a:t>) {
+        var status = </a:t>
+            </a:r>
+            <a:r>
+              <a:rPr lang="en-US" sz="1000" dirty="0" err="1">
+                <a:solidFill>
+                  <a:srgbClr val="E2E8F0"/>
+                </a:solidFill>
+                <a:latin typeface="Consolas"/>
+              </a:rPr>
+              <a:t>LookUpStatus</a:t>
+            </a:r>
+            <a:r>
+              <a:rPr lang="en-US" sz="1000" dirty="0">
+                <a:solidFill>
+                  <a:srgbClr val="E2E8F0"/>
+                </a:solidFill>
+                <a:latin typeface="Consolas"/>
+              </a:rPr>
+              <a:t>(</a:t>
+            </a:r>
+            <a:r>
+              <a:rPr lang="en-US" sz="1000" dirty="0" err="1">
+                <a:solidFill>
+                  <a:srgbClr val="E2E8F0"/>
+                </a:solidFill>
+                <a:latin typeface="Consolas"/>
+              </a:rPr>
+              <a:t>ctx.Message.OrderId</a:t>
+            </a:r>
+            <a:r>
+              <a:rPr lang="en-US" sz="1000" dirty="0">
+                <a:solidFill>
+                  <a:srgbClr val="E2E8F0"/>
+                </a:solidFill>
+                <a:latin typeface="Consolas"/>
+              </a:rPr>
+              <a:t>);
+        await </a:t>
+            </a:r>
+            <a:r>
+              <a:rPr lang="en-US" sz="1000" dirty="0" err="1">
+                <a:solidFill>
+                  <a:srgbClr val="E2E8F0"/>
+                </a:solidFill>
+                <a:latin typeface="Consolas"/>
+              </a:rPr>
+              <a:t>ctx.RespondAsync</a:t>
+            </a:r>
+            <a:r>
+              <a:rPr lang="en-US" sz="1000" dirty="0">
+                <a:solidFill>
+                  <a:srgbClr val="E2E8F0"/>
+                </a:solidFill>
+                <a:latin typeface="Consolas"/>
+              </a:rPr>
+              <a:t>(
+            new </a:t>
+            </a:r>
+            <a:r>
+              <a:rPr lang="en-US" sz="1000" dirty="0" err="1">
+                <a:solidFill>
+                  <a:srgbClr val="E2E8F0"/>
+                </a:solidFill>
+                <a:latin typeface="Consolas"/>
+              </a:rPr>
+              <a:t>OrderStatusResult</a:t>
+            </a:r>
+            <a:r>
+              <a:rPr lang="en-US" sz="1000" dirty="0">
+                <a:solidFill>
+                  <a:srgbClr val="E2E8F0"/>
+                </a:solidFill>
+                <a:latin typeface="Consolas"/>
+              </a:rPr>
+              <a:t>(</a:t>
+            </a:r>
+            <a:r>
+              <a:rPr lang="en-US" sz="1000" dirty="0" err="1">
+                <a:solidFill>
+                  <a:srgbClr val="E2E8F0"/>
+                </a:solidFill>
+                <a:latin typeface="Consolas"/>
+              </a:rPr>
+              <a:t>ctx.Message.OrderId</a:t>
+            </a:r>
+            <a:r>
+              <a:rPr lang="en-US" sz="1000" dirty="0">
+                <a:solidFill>
+                  <a:srgbClr val="E2E8F0"/>
+                </a:solidFill>
+                <a:latin typeface="Consolas"/>
+              </a:rPr>
+              <a:t>, status));
     }
 }</a:t>
             </a:r>
